--- a/tests/fixtures/corporate.pptx
+++ b/tests/fixtures/corporate.pptx
@@ -293,6 +293,90 @@
       <dsp:cNvGrpSpPr/>
     </dsp:nvGrpSpPr>
     <dsp:grpSpPr/>
+    <dsp:sp modelId="{7F2C4F4E-0001-4E2E-9F4E-000000000001}">
+      <dsp:nvSpPr>
+        <dsp:cNvPr id="0" name=""/>
+        <dsp:cNvSpPr/>
+      </dsp:nvSpPr>
+      <dsp:spPr>
+        <a:xfrm>
+          <a:off x="0" y="0"/>
+          <a:ext cx="2743200" cy="709295"/>
+        </a:xfrm>
+        <a:prstGeom prst="roundRect">
+          <a:avLst/>
+        </a:prstGeom>
+        <a:solidFill>
+          <a:schemeClr val="accent1"/>
+        </a:solidFill>
+      </dsp:spPr>
+      <dsp:txBody>
+        <a:bodyPr/>
+        <a:lstStyle/>
+        <a:p>
+          <a:r>
+            <a:rPr lang="en-US"/>
+            <a:t>Plan</a:t>
+          </a:r>
+        </a:p>
+      </dsp:txBody>
+    </dsp:sp>
+    <dsp:sp modelId="{7F2C4F4E-0002-4E2E-9F4E-000000000002}">
+      <dsp:nvSpPr>
+        <dsp:cNvPr id="0" name=""/>
+        <dsp:cNvSpPr/>
+      </dsp:nvSpPr>
+      <dsp:spPr>
+        <a:xfrm>
+          <a:off x="0" y="790575"/>
+          <a:ext cx="2743200" cy="709295"/>
+        </a:xfrm>
+        <a:prstGeom prst="roundRect">
+          <a:avLst/>
+        </a:prstGeom>
+        <a:solidFill>
+          <a:schemeClr val="accent1"/>
+        </a:solidFill>
+      </dsp:spPr>
+      <dsp:txBody>
+        <a:bodyPr/>
+        <a:lstStyle/>
+        <a:p>
+          <a:r>
+            <a:rPr lang="en-US"/>
+            <a:t>Build</a:t>
+          </a:r>
+        </a:p>
+      </dsp:txBody>
+    </dsp:sp>
+    <dsp:sp modelId="{7F2C4F4E-0003-4E2E-9F4E-000000000003}">
+      <dsp:nvSpPr>
+        <dsp:cNvPr id="0" name=""/>
+        <dsp:cNvSpPr/>
+      </dsp:nvSpPr>
+      <dsp:spPr>
+        <a:xfrm>
+          <a:off x="0" y="1581150"/>
+          <a:ext cx="2743200" cy="709295"/>
+        </a:xfrm>
+        <a:prstGeom prst="roundRect">
+          <a:avLst/>
+        </a:prstGeom>
+        <a:solidFill>
+          <a:schemeClr val="accent1"/>
+        </a:solidFill>
+      </dsp:spPr>
+      <dsp:txBody>
+        <a:bodyPr/>
+        <a:lstStyle/>
+        <a:p>
+          <a:r>
+            <a:rPr lang="en-US"/>
+            <a:t>Ship</a:t>
+          </a:r>
+        </a:p>
+      </dsp:txBody>
+    </dsp:sp>
   </dsp:spTree>
 </dsp:drawing>
 </file>
@@ -678,7 +762,19 @@
           <a:lstStyle/>
           <a:p>
             <a:r>
-              <a:t/>
+              <a:rPr b="true">
+                <a:solidFill>
+                  <a:schemeClr val="accent1"/>
+                </a:solidFill>
+              </a:rPr>
+              <a:t>Quarterly review</a:t>
+            </a:r>
+            <a:br>
+              <a:rPr lang="en-US"/>
+            </a:br>
+            <a:r>
+              <a:rPr b="true"/>
+              <a:t> across EMEA and APAC</a:t>
             </a:r>
           </a:p>
         </p:txBody>
@@ -699,51 +795,14 @@
           <a:lstStyle/>
           <a:p>
             <a:r>
-              <a:t/>
-            </a:r>
-          </a:p>
-        </p:txBody>
-      </p:sp>
-      <p:sp>
-        <p:nvSpPr>
-          <p:cNvPr id="4" name="TextBox 4"/>
-          <p:cNvSpPr txBox="1"/>
-          <p:nvPr/>
-        </p:nvSpPr>
-        <p:spPr>
-          <a:xfrm>
-            <a:off x="548640" y="320040"/>
-            <a:ext cx="8229600" cy="1097280"/>
-          </a:xfrm>
-          <a:prstGeom prst="rect">
-            <a:avLst/>
-          </a:prstGeom>
-        </p:spPr>
-        <p:txBody>
-          <a:bodyPr/>
-          <a:lstStyle/>
-          <a:p>
-            <a:r>
-              <a:rPr sz="3200" b="true">
-                <a:solidFill>
-                  <a:schemeClr val="accent1"/>
-                </a:solidFill>
-              </a:rPr>
-              <a:t>Quarterly review</a:t>
-            </a:r>
-            <a:br>
-              <a:rPr lang="en-US"/>
-            </a:br>
-            <a:r>
-              <a:rPr sz="3200" b="true"/>
-              <a:t> across EMEA and APAC</a:t>
+              <a:t>Revenue ahead of plan in every region</a:t>
             </a:r>
           </a:p>
         </p:txBody>
       </p:sp>
       <p:pic>
         <p:nvPicPr>
-          <p:cNvPr id="5" name="Picture 5"/>
+          <p:cNvPr id="4" name="Picture 4"/>
           <p:cNvPicPr>
             <a:picLocks noChangeAspect="1"/>
           </p:cNvPicPr>
@@ -768,7 +827,7 @@
       </p:pic>
       <p:pic>
         <p:nvPicPr>
-          <p:cNvPr id="6" name="Picture 6"/>
+          <p:cNvPr id="5" name="Picture 5"/>
           <p:cNvPicPr>
             <a:picLocks noChangeAspect="1"/>
           </p:cNvPicPr>
@@ -790,7 +849,7 @@
       </p:pic>
       <p:sp>
         <p:nvSpPr>
-          <p:cNvPr id="7" name="Shape 7"/>
+          <p:cNvPr id="6" name="Shape 6"/>
           <p:cNvSpPr/>
           <p:nvPr/>
         </p:nvSpPr>
@@ -840,7 +899,7 @@
       </p:sp>
       <p:graphicFrame>
         <p:nvGraphicFramePr>
-          <p:cNvPr id="8" name="Chart 8"/>
+          <p:cNvPr id="7" name="Chart 7"/>
           <p:cNvGraphicFramePr>
             <a:graphicFrameLocks noGrp="1"/>
           </p:cNvGraphicFramePr>
@@ -858,7 +917,7 @@
       </p:graphicFrame>
       <p:graphicFrame>
         <p:nvGraphicFramePr>
-          <p:cNvPr id="9" name="Diagram 9"/>
+          <p:cNvPr id="8" name="Diagram 8"/>
           <p:cNvGraphicFramePr>
             <a:graphicFrameLocks noGrp="1"/>
           </p:cNvGraphicFramePr>
@@ -876,7 +935,7 @@
       </p:graphicFrame>
       <p:graphicFrame>
         <p:nvGraphicFramePr>
-          <p:cNvPr id="10" name="Table 10"/>
+          <p:cNvPr id="9" name="Table 9"/>
           <p:cNvGraphicFramePr>
             <a:graphicFrameLocks noGrp="1"/>
           </p:cNvGraphicFramePr>
@@ -1017,7 +1076,7 @@
       </p:graphicFrame>
       <p:sp>
         <p:nvSpPr>
-          <p:cNvPr id="11" name="Shape 11"/>
+          <p:cNvPr id="10" name="Shape 10"/>
           <p:cNvSpPr/>
           <p:nvPr/>
         </p:nvSpPr>
@@ -1026,8 +1085,10 @@
             <a:off x="548640" y="2971800"/>
             <a:ext cx="11064240" cy="548640"/>
           </a:xfrm>
-          <a:prstGeom prst="rect">
-            <a:avLst/>
+          <a:prstGeom prst="roundRect">
+            <a:avLst>
+              <a:gd name="adj" fmla="val 25000"/>
+            </a:avLst>
           </a:prstGeom>
           <a:solidFill>
             <a:srgbClr val="1F3864">
@@ -1050,7 +1111,7 @@
       </p:sp>
       <p:sp>
         <p:nvSpPr>
-          <p:cNvPr id="12" name="TextBox 12"/>
+          <p:cNvPr id="11" name="TextBox 11"/>
           <p:cNvSpPr txBox="1"/>
           <p:nvPr/>
         </p:nvSpPr>
@@ -1072,6 +1133,7 @@
               <a:buChar char="§"/>
             </a:pPr>
             <a:r>
+              <a:rPr u="sng"/>
               <a:t>Margin expanded</a:t>
             </a:r>
           </a:p>
@@ -1081,6 +1143,7 @@
               <a:buChar char="§"/>
             </a:pPr>
             <a:r>
+              <a:rPr strike="sngStrike"/>
               <a:t>Pipeline healthy</a:t>
             </a:r>
           </a:p>
@@ -1090,6 +1153,11 @@
               <a:buChar char="§"/>
             </a:pPr>
             <a:r>
+              <a:rPr>
+                <a:highlight>
+                  <a:srgbClr val="FFFF00"/>
+                </a:highlight>
+              </a:rPr>
               <a:t>Headcount flat</a:t>
             </a:r>
           </a:p>
